--- a/docs/Vision_Gate_Presentation.pptx
+++ b/docs/Vision_Gate_Presentation.pptx
@@ -3086,6 +3086,22 @@
 <file path=ppt/slides/slide1.xml><?xml version="1.0" encoding="utf-8"?>
 <p:sld xmlns:a="http://schemas.openxmlformats.org/drawingml/2006/main" xmlns:p="http://schemas.openxmlformats.org/presentationml/2006/main" xmlns:r="http://schemas.openxmlformats.org/officeDocument/2006/relationships">
   <p:cSld>
+    <p:bg>
+      <p:bgPr>
+        <a:gradFill rotWithShape="1">
+          <a:gsLst>
+            <a:gs pos="0">
+              <a:srgbClr val="667EEA"/>
+            </a:gs>
+            <a:gs pos="100000">
+              <a:srgbClr val="764BA2"/>
+            </a:gs>
+          </a:gsLst>
+          <a:lin scaled="0" ang="18900000"/>
+        </a:gradFill>
+        <a:effectLst/>
+      </p:bgPr>
+    </p:bg>
     <p:spTree>
       <p:nvGrpSpPr>
         <p:cNvPr id="1" name=""/>
@@ -3095,53 +3111,182 @@
       <p:grpSpPr/>
       <p:sp>
         <p:nvSpPr>
-          <p:cNvPr id="2" name="Title 1"/>
-          <p:cNvSpPr>
-            <a:spLocks noGrp="1"/>
-          </p:cNvSpPr>
-          <p:nvPr>
-            <p:ph type="ctrTitle"/>
-          </p:nvPr>
-        </p:nvSpPr>
-        <p:spPr/>
-        <p:txBody>
-          <a:bodyPr/>
-          <a:lstStyle/>
-          <a:p>
-            <a:r>
-              <a:t>Vision Entry Gate Pass Management System</a:t>
-            </a:r>
-          </a:p>
-        </p:txBody>
-      </p:sp>
-      <p:sp>
-        <p:nvSpPr>
-          <p:cNvPr id="3" name="Subtitle 2"/>
-          <p:cNvSpPr>
-            <a:spLocks noGrp="1"/>
-          </p:cNvSpPr>
-          <p:nvPr>
-            <p:ph type="subTitle" idx="1"/>
-          </p:nvPr>
-        </p:nvSpPr>
-        <p:spPr/>
-        <p:txBody>
-          <a:bodyPr/>
-          <a:lstStyle/>
-          <a:p>
+          <p:cNvPr id="2" name="Oval 1"/>
+          <p:cNvSpPr/>
+          <p:nvPr/>
+        </p:nvSpPr>
+        <p:spPr>
+          <a:xfrm>
+            <a:off x="7315200" y="457200"/>
+            <a:ext cx="1828800" cy="1828800"/>
+          </a:xfrm>
+          <a:prstGeom prst="ellipse">
+            <a:avLst/>
+          </a:prstGeom>
+          <a:solidFill>
+            <a:srgbClr val="E6E6FA"/>
+          </a:solidFill>
+          <a:ln>
+            <a:noFill/>
+          </a:ln>
+          <a:effectLst/>
+        </p:spPr>
+        <p:style>
+          <a:lnRef idx="1">
+            <a:schemeClr val="accent1"/>
+          </a:lnRef>
+          <a:fillRef idx="3">
+            <a:schemeClr val="accent1"/>
+          </a:fillRef>
+          <a:effectRef idx="2">
+            <a:schemeClr val="accent1"/>
+          </a:effectRef>
+          <a:fontRef idx="minor">
+            <a:schemeClr val="lt1"/>
+          </a:fontRef>
+        </p:style>
+        <p:txBody>
+          <a:bodyPr rtlCol="0" anchor="ctr"/>
+          <a:lstStyle/>
+          <a:p>
+            <a:pPr algn="ctr"/>
+          </a:p>
+        </p:txBody>
+      </p:sp>
+      <p:sp>
+        <p:nvSpPr>
+          <p:cNvPr id="3" name="Oval 2"/>
+          <p:cNvSpPr/>
+          <p:nvPr/>
+        </p:nvSpPr>
+        <p:spPr>
+          <a:xfrm>
+            <a:off x="457200" y="4572000"/>
+            <a:ext cx="1371600" cy="1371600"/>
+          </a:xfrm>
+          <a:prstGeom prst="ellipse">
+            <a:avLst/>
+          </a:prstGeom>
+          <a:solidFill>
+            <a:srgbClr val="C8C8DC"/>
+          </a:solidFill>
+          <a:ln>
+            <a:noFill/>
+          </a:ln>
+          <a:effectLst/>
+        </p:spPr>
+        <p:style>
+          <a:lnRef idx="1">
+            <a:schemeClr val="accent1"/>
+          </a:lnRef>
+          <a:fillRef idx="3">
+            <a:schemeClr val="accent1"/>
+          </a:fillRef>
+          <a:effectRef idx="2">
+            <a:schemeClr val="accent1"/>
+          </a:effectRef>
+          <a:fontRef idx="minor">
+            <a:schemeClr val="lt1"/>
+          </a:fontRef>
+        </p:style>
+        <p:txBody>
+          <a:bodyPr rtlCol="0" anchor="ctr"/>
+          <a:lstStyle/>
+          <a:p>
+            <a:pPr algn="ctr"/>
+          </a:p>
+        </p:txBody>
+      </p:sp>
+      <p:sp>
+        <p:nvSpPr>
+          <p:cNvPr id="4" name="Rounded Rectangle 3"/>
+          <p:cNvSpPr/>
+          <p:nvPr/>
+        </p:nvSpPr>
+        <p:spPr>
+          <a:xfrm>
+            <a:off x="914400" y="1828800"/>
+            <a:ext cx="7315200" cy="2286000"/>
+          </a:xfrm>
+          <a:prstGeom prst="roundRect">
+            <a:avLst/>
+          </a:prstGeom>
+          <a:solidFill>
+            <a:srgbClr val="FFFFFF"/>
+          </a:solidFill>
+          <a:ln>
+            <a:solidFill>
+              <a:srgbClr val="FFFFFF"/>
+            </a:solidFill>
+          </a:ln>
+          <a:effectLst/>
+        </p:spPr>
+        <p:style>
+          <a:lnRef idx="1">
+            <a:schemeClr val="accent1"/>
+          </a:lnRef>
+          <a:fillRef idx="3">
+            <a:schemeClr val="accent1"/>
+          </a:fillRef>
+          <a:effectRef idx="2">
+            <a:schemeClr val="accent1"/>
+          </a:effectRef>
+          <a:fontRef idx="minor">
+            <a:schemeClr val="lt1"/>
+          </a:fontRef>
+        </p:style>
+        <p:txBody>
+          <a:bodyPr rtlCol="0" anchor="ctr"/>
+          <a:lstStyle/>
+          <a:p>
+            <a:pPr algn="ctr">
+              <a:defRPr sz="4400" b="1">
+                <a:solidFill>
+                  <a:srgbClr val="667EEA"/>
+                </a:solidFill>
+              </a:defRPr>
+            </a:pPr>
+            <a:r>
+              <a:t>Vision Entry Gate Pass</a:t>
+            </a:r>
+          </a:p>
+          <a:p>
+            <a:pPr algn="ctr">
+              <a:defRPr sz="3600" b="1">
+                <a:solidFill>
+                  <a:srgbClr val="764BA2"/>
+                </a:solidFill>
+              </a:defRPr>
+            </a:pPr>
+            <a:r>
+              <a:t>Management System</a:t>
+            </a:r>
+          </a:p>
+          <a:p>
+            <a:pPr algn="ctr">
+              <a:spcAft>
+                <a:spcPts val="1200"/>
+              </a:spcAft>
+              <a:defRPr sz="2000">
+                <a:solidFill>
+                  <a:srgbClr val="646464"/>
+                </a:solidFill>
+              </a:defRPr>
+            </a:pPr>
             <a:r>
               <a:t>A Secure Visitor Management Solution</a:t>
             </a:r>
           </a:p>
-          <a:p/>
-          <a:p>
-            <a:r>
-              <a:t>Presented by: Vision Gate Team</a:t>
-            </a:r>
-          </a:p>
-          <a:p>
-            <a:r>
-              <a:t>Date: August 2026</a:t>
+          <a:p>
+            <a:pPr algn="ctr">
+              <a:defRPr sz="1600">
+                <a:solidFill>
+                  <a:srgbClr val="969696"/>
+                </a:solidFill>
+              </a:defRPr>
+            </a:pPr>
+            <a:r>
+              <a:t>Presented by: Vision Gate Team | August 2026</a:t>
             </a:r>
           </a:p>
         </p:txBody>
@@ -3157,6 +3302,22 @@
 <file path=ppt/slides/slide2.xml><?xml version="1.0" encoding="utf-8"?>
 <p:sld xmlns:a="http://schemas.openxmlformats.org/drawingml/2006/main" xmlns:p="http://schemas.openxmlformats.org/presentationml/2006/main" xmlns:r="http://schemas.openxmlformats.org/officeDocument/2006/relationships">
   <p:cSld>
+    <p:bg>
+      <p:bgPr>
+        <a:gradFill rotWithShape="1">
+          <a:gsLst>
+            <a:gs pos="0">
+              <a:srgbClr val="667EEA"/>
+            </a:gs>
+            <a:gs pos="100000">
+              <a:srgbClr val="764BA2"/>
+            </a:gs>
+          </a:gsLst>
+          <a:lin scaled="0" ang="18900000"/>
+        </a:gradFill>
+        <a:effectLst/>
+      </p:bgPr>
+    </p:bg>
     <p:spTree>
       <p:nvGrpSpPr>
         <p:cNvPr id="1" name=""/>
@@ -3166,19 +3327,52 @@
       <p:grpSpPr/>
       <p:sp>
         <p:nvSpPr>
-          <p:cNvPr id="2" name="Title 1"/>
-          <p:cNvSpPr>
-            <a:spLocks noGrp="1"/>
-          </p:cNvSpPr>
-          <p:nvPr>
-            <p:ph type="title"/>
-          </p:nvPr>
-        </p:nvSpPr>
-        <p:spPr/>
-        <p:txBody>
-          <a:bodyPr/>
-          <a:lstStyle/>
-          <a:p>
+          <p:cNvPr id="2" name="Rounded Rectangle 1"/>
+          <p:cNvSpPr/>
+          <p:nvPr/>
+        </p:nvSpPr>
+        <p:spPr>
+          <a:xfrm>
+            <a:off x="457200" y="457200"/>
+            <a:ext cx="8229600" cy="1371600"/>
+          </a:xfrm>
+          <a:prstGeom prst="roundRect">
+            <a:avLst/>
+          </a:prstGeom>
+          <a:solidFill>
+            <a:srgbClr val="FFFFFF"/>
+          </a:solidFill>
+          <a:ln w="38100">
+            <a:solidFill>
+              <a:srgbClr val="667EEA"/>
+            </a:solidFill>
+          </a:ln>
+        </p:spPr>
+        <p:style>
+          <a:lnRef idx="1">
+            <a:schemeClr val="accent1"/>
+          </a:lnRef>
+          <a:fillRef idx="3">
+            <a:schemeClr val="accent1"/>
+          </a:fillRef>
+          <a:effectRef idx="2">
+            <a:schemeClr val="accent1"/>
+          </a:effectRef>
+          <a:fontRef idx="minor">
+            <a:schemeClr val="lt1"/>
+          </a:fontRef>
+        </p:style>
+        <p:txBody>
+          <a:bodyPr rtlCol="0" anchor="ctr" wrap="square"/>
+          <a:lstStyle/>
+          <a:p>
+            <a:pPr algn="ctr">
+              <a:defRPr sz="3200" b="1">
+                <a:solidFill>
+                  <a:srgbClr val="667EEA"/>
+                </a:solidFill>
+              </a:defRPr>
+            </a:pPr>
             <a:r>
               <a:t>Problem Statement</a:t>
             </a:r>
@@ -3187,17 +3381,43 @@
       </p:sp>
       <p:sp>
         <p:nvSpPr>
-          <p:cNvPr id="3" name="Content Placeholder 2"/>
-          <p:cNvSpPr>
-            <a:spLocks noGrp="1"/>
-          </p:cNvSpPr>
-          <p:nvPr>
-            <p:ph idx="1"/>
-          </p:nvPr>
-        </p:nvSpPr>
-        <p:spPr/>
-        <p:txBody>
-          <a:bodyPr/>
+          <p:cNvPr id="3" name="Rounded Rectangle 2"/>
+          <p:cNvSpPr/>
+          <p:nvPr/>
+        </p:nvSpPr>
+        <p:spPr>
+          <a:xfrm>
+            <a:off x="457200" y="2011680"/>
+            <a:ext cx="3840480" cy="4114800"/>
+          </a:xfrm>
+          <a:prstGeom prst="roundRect">
+            <a:avLst/>
+          </a:prstGeom>
+          <a:solidFill>
+            <a:srgbClr val="FFFFFF"/>
+          </a:solidFill>
+          <a:ln w="25400">
+            <a:solidFill>
+              <a:srgbClr val="C8C8C8"/>
+            </a:solidFill>
+          </a:ln>
+        </p:spPr>
+        <p:style>
+          <a:lnRef idx="1">
+            <a:schemeClr val="accent1"/>
+          </a:lnRef>
+          <a:fillRef idx="3">
+            <a:schemeClr val="accent1"/>
+          </a:fillRef>
+          <a:effectRef idx="2">
+            <a:schemeClr val="accent1"/>
+          </a:effectRef>
+          <a:fontRef idx="minor">
+            <a:schemeClr val="lt1"/>
+          </a:fontRef>
+        </p:style>
+        <p:txBody>
+          <a:bodyPr rtlCol="0" anchor="ctr" wrap="square" lIns="182880" rIns="182880" tIns="182880" bIns="182880"/>
           <a:lstStyle/>
           <a:p>
             <a:r>
@@ -3205,56 +3425,198 @@
             </a:r>
           </a:p>
           <a:p>
-            <a:r>
-              <a:t>• Manual visitor registration processes</a:t>
-            </a:r>
-          </a:p>
-          <a:p>
-            <a:r>
-              <a:t>• Paper-based gate pass systems</a:t>
-            </a:r>
-          </a:p>
-          <a:p>
-            <a:r>
-              <a:t>• Security concerns with unverified visitors</a:t>
-            </a:r>
-          </a:p>
-          <a:p>
-            <a:r>
-              <a:t>• Lack of real-time tracking</a:t>
-            </a:r>
-          </a:p>
-          <a:p>
-            <a:r>
-              <a:t>• Inefficient verification processes</a:t>
-            </a:r>
-          </a:p>
+            <a:pPr>
+              <a:spcBef>
+                <a:spcPts val="800"/>
+              </a:spcBef>
+              <a:defRPr sz="1600">
+                <a:solidFill>
+                  <a:srgbClr val="505050"/>
+                </a:solidFill>
+              </a:defRPr>
+            </a:pPr>
+            <a:r>
+              <a:t>• Manual visitor registration</a:t>
+            </a:r>
+          </a:p>
+          <a:p>
+            <a:pPr>
+              <a:spcBef>
+                <a:spcPts val="800"/>
+              </a:spcBef>
+              <a:defRPr sz="1600">
+                <a:solidFill>
+                  <a:srgbClr val="505050"/>
+                </a:solidFill>
+              </a:defRPr>
+            </a:pPr>
+            <a:r>
+              <a:t>• Paper-based systems</a:t>
+            </a:r>
+          </a:p>
+          <a:p>
+            <a:pPr>
+              <a:spcBef>
+                <a:spcPts val="800"/>
+              </a:spcBef>
+              <a:defRPr sz="1600">
+                <a:solidFill>
+                  <a:srgbClr val="505050"/>
+                </a:solidFill>
+              </a:defRPr>
+            </a:pPr>
+            <a:r>
+              <a:t>• Security concerns</a:t>
+            </a:r>
+          </a:p>
+          <a:p>
+            <a:pPr>
+              <a:spcBef>
+                <a:spcPts val="800"/>
+              </a:spcBef>
+              <a:defRPr sz="1600">
+                <a:solidFill>
+                  <a:srgbClr val="505050"/>
+                </a:solidFill>
+              </a:defRPr>
+            </a:pPr>
+            <a:r>
+              <a:t>• No real-time tracking</a:t>
+            </a:r>
+          </a:p>
+          <a:p>
+            <a:pPr>
+              <a:spcBef>
+                <a:spcPts val="800"/>
+              </a:spcBef>
+              <a:defRPr sz="1600">
+                <a:solidFill>
+                  <a:srgbClr val="505050"/>
+                </a:solidFill>
+              </a:defRPr>
+            </a:pPr>
+            <a:r>
+              <a:t>• Inefficient verification</a:t>
+            </a:r>
+          </a:p>
+        </p:txBody>
+      </p:sp>
+      <p:sp>
+        <p:nvSpPr>
+          <p:cNvPr id="4" name="Rounded Rectangle 3"/>
+          <p:cNvSpPr/>
+          <p:nvPr/>
+        </p:nvSpPr>
+        <p:spPr>
+          <a:xfrm>
+            <a:off x="4572000" y="2011680"/>
+            <a:ext cx="3840480" cy="4114800"/>
+          </a:xfrm>
+          <a:prstGeom prst="roundRect">
+            <a:avLst/>
+          </a:prstGeom>
+          <a:solidFill>
+            <a:srgbClr val="FFFFFF"/>
+          </a:solidFill>
+          <a:ln w="25400">
+            <a:solidFill>
+              <a:srgbClr val="C8C8C8"/>
+            </a:solidFill>
+          </a:ln>
+        </p:spPr>
+        <p:style>
+          <a:lnRef idx="1">
+            <a:schemeClr val="accent1"/>
+          </a:lnRef>
+          <a:fillRef idx="3">
+            <a:schemeClr val="accent1"/>
+          </a:fillRef>
+          <a:effectRef idx="2">
+            <a:schemeClr val="accent1"/>
+          </a:effectRef>
+          <a:fontRef idx="minor">
+            <a:schemeClr val="lt1"/>
+          </a:fontRef>
+        </p:style>
+        <p:txBody>
+          <a:bodyPr rtlCol="0" anchor="ctr" wrap="square" lIns="182880" rIns="182880" tIns="182880" bIns="182880"/>
+          <a:lstStyle/>
           <a:p>
             <a:r>
               <a:t>Need for Automation</a:t>
             </a:r>
           </a:p>
           <a:p>
-            <a:r>
-              <a:t>• Streamlined visitor management</a:t>
-            </a:r>
-          </a:p>
-          <a:p>
-            <a:r>
-              <a:t>• Enhanced security measures</a:t>
-            </a:r>
-          </a:p>
-          <a:p>
-            <a:r>
-              <a:t>• Digital record keeping</a:t>
-            </a:r>
-          </a:p>
-          <a:p>
-            <a:r>
-              <a:t>• Quick verification process</a:t>
-            </a:r>
-          </a:p>
-          <a:p>
+            <a:pPr>
+              <a:spcBef>
+                <a:spcPts val="800"/>
+              </a:spcBef>
+              <a:defRPr sz="1600">
+                <a:solidFill>
+                  <a:srgbClr val="505050"/>
+                </a:solidFill>
+              </a:defRPr>
+            </a:pPr>
+            <a:r>
+              <a:t>• Streamlined management</a:t>
+            </a:r>
+          </a:p>
+          <a:p>
+            <a:pPr>
+              <a:spcBef>
+                <a:spcPts val="800"/>
+              </a:spcBef>
+              <a:defRPr sz="1600">
+                <a:solidFill>
+                  <a:srgbClr val="505050"/>
+                </a:solidFill>
+              </a:defRPr>
+            </a:pPr>
+            <a:r>
+              <a:t>• Enhanced security</a:t>
+            </a:r>
+          </a:p>
+          <a:p>
+            <a:pPr>
+              <a:spcBef>
+                <a:spcPts val="800"/>
+              </a:spcBef>
+              <a:defRPr sz="1600">
+                <a:solidFill>
+                  <a:srgbClr val="505050"/>
+                </a:solidFill>
+              </a:defRPr>
+            </a:pPr>
+            <a:r>
+              <a:t>• Digital documentation</a:t>
+            </a:r>
+          </a:p>
+          <a:p>
+            <a:pPr>
+              <a:spcBef>
+                <a:spcPts val="800"/>
+              </a:spcBef>
+              <a:defRPr sz="1600">
+                <a:solidFill>
+                  <a:srgbClr val="505050"/>
+                </a:solidFill>
+              </a:defRPr>
+            </a:pPr>
+            <a:r>
+              <a:t>• Quick verification</a:t>
+            </a:r>
+          </a:p>
+          <a:p>
+            <a:pPr>
+              <a:spcBef>
+                <a:spcPts val="800"/>
+              </a:spcBef>
+              <a:defRPr sz="1600">
+                <a:solidFill>
+                  <a:srgbClr val="505050"/>
+                </a:solidFill>
+              </a:defRPr>
+            </a:pPr>
             <a:r>
               <a:t>• Audit trail capabilities</a:t>
             </a:r>
@@ -3272,6 +3634,22 @@
 <file path=ppt/slides/slide3.xml><?xml version="1.0" encoding="utf-8"?>
 <p:sld xmlns:a="http://schemas.openxmlformats.org/drawingml/2006/main" xmlns:p="http://schemas.openxmlformats.org/presentationml/2006/main" xmlns:r="http://schemas.openxmlformats.org/officeDocument/2006/relationships">
   <p:cSld>
+    <p:bg>
+      <p:bgPr>
+        <a:gradFill rotWithShape="1">
+          <a:gsLst>
+            <a:gs pos="0">
+              <a:srgbClr val="667EEA"/>
+            </a:gs>
+            <a:gs pos="100000">
+              <a:srgbClr val="764BA2"/>
+            </a:gs>
+          </a:gsLst>
+          <a:lin scaled="0" ang="18900000"/>
+        </a:gradFill>
+        <a:effectLst/>
+      </p:bgPr>
+    </p:bg>
     <p:spTree>
       <p:nvGrpSpPr>
         <p:cNvPr id="1" name=""/>
@@ -3281,19 +3659,52 @@
       <p:grpSpPr/>
       <p:sp>
         <p:nvSpPr>
-          <p:cNvPr id="2" name="Title 1"/>
-          <p:cNvSpPr>
-            <a:spLocks noGrp="1"/>
-          </p:cNvSpPr>
-          <p:nvPr>
-            <p:ph type="title"/>
-          </p:nvPr>
-        </p:nvSpPr>
-        <p:spPr/>
-        <p:txBody>
-          <a:bodyPr/>
-          <a:lstStyle/>
-          <a:p>
+          <p:cNvPr id="2" name="Rounded Rectangle 1"/>
+          <p:cNvSpPr/>
+          <p:nvPr/>
+        </p:nvSpPr>
+        <p:spPr>
+          <a:xfrm>
+            <a:off x="457200" y="457200"/>
+            <a:ext cx="8229600" cy="1371600"/>
+          </a:xfrm>
+          <a:prstGeom prst="roundRect">
+            <a:avLst/>
+          </a:prstGeom>
+          <a:solidFill>
+            <a:srgbClr val="FFFFFF"/>
+          </a:solidFill>
+          <a:ln w="38100">
+            <a:solidFill>
+              <a:srgbClr val="667EEA"/>
+            </a:solidFill>
+          </a:ln>
+        </p:spPr>
+        <p:style>
+          <a:lnRef idx="1">
+            <a:schemeClr val="accent1"/>
+          </a:lnRef>
+          <a:fillRef idx="3">
+            <a:schemeClr val="accent1"/>
+          </a:fillRef>
+          <a:effectRef idx="2">
+            <a:schemeClr val="accent1"/>
+          </a:effectRef>
+          <a:fontRef idx="minor">
+            <a:schemeClr val="lt1"/>
+          </a:fontRef>
+        </p:style>
+        <p:txBody>
+          <a:bodyPr rtlCol="0" anchor="ctr" wrap="square"/>
+          <a:lstStyle/>
+          <a:p>
+            <a:pPr algn="ctr">
+              <a:defRPr sz="3200" b="1">
+                <a:solidFill>
+                  <a:srgbClr val="667EEA"/>
+                </a:solidFill>
+              </a:defRPr>
+            </a:pPr>
             <a:r>
               <a:t>System Overview</a:t>
             </a:r>
@@ -3302,81 +3713,231 @@
       </p:sp>
       <p:sp>
         <p:nvSpPr>
-          <p:cNvPr id="3" name="Content Placeholder 2"/>
-          <p:cNvSpPr>
-            <a:spLocks noGrp="1"/>
-          </p:cNvSpPr>
-          <p:nvPr>
-            <p:ph idx="1"/>
-          </p:nvPr>
-        </p:nvSpPr>
-        <p:spPr/>
-        <p:txBody>
-          <a:bodyPr/>
-          <a:lstStyle/>
-          <a:p>
+          <p:cNvPr id="3" name="Rounded Rectangle 2"/>
+          <p:cNvSpPr/>
+          <p:nvPr/>
+        </p:nvSpPr>
+        <p:spPr>
+          <a:xfrm>
+            <a:off x="457200" y="2011680"/>
+            <a:ext cx="8229600" cy="4114800"/>
+          </a:xfrm>
+          <a:prstGeom prst="roundRect">
+            <a:avLst/>
+          </a:prstGeom>
+          <a:solidFill>
+            <a:srgbClr val="FFFFFF"/>
+          </a:solidFill>
+          <a:ln w="25400">
+            <a:solidFill>
+              <a:srgbClr val="C8C8C8"/>
+            </a:solidFill>
+          </a:ln>
+        </p:spPr>
+        <p:style>
+          <a:lnRef idx="1">
+            <a:schemeClr val="accent1"/>
+          </a:lnRef>
+          <a:fillRef idx="3">
+            <a:schemeClr val="accent1"/>
+          </a:fillRef>
+          <a:effectRef idx="2">
+            <a:schemeClr val="accent1"/>
+          </a:effectRef>
+          <a:fontRef idx="minor">
+            <a:schemeClr val="lt1"/>
+          </a:fontRef>
+        </p:style>
+        <p:txBody>
+          <a:bodyPr rtlCol="0" anchor="ctr" wrap="square" lIns="182880" rIns="182880" tIns="182880" bIns="182880"/>
+          <a:lstStyle/>
+          <a:p>
+            <a:pPr>
+              <a:defRPr sz="1800" b="1">
+                <a:solidFill>
+                  <a:srgbClr val="667EEA"/>
+                </a:solidFill>
+              </a:defRPr>
+            </a:pPr>
             <a:r>
               <a:t>What is Vision Gate?</a:t>
             </a:r>
           </a:p>
           <a:p>
-            <a:r>
-              <a:t>A web-based visitor management system that automates gate pass creation and verification processes.</a:t>
-            </a:r>
-          </a:p>
-          <a:p>
+            <a:pPr>
+              <a:spcAft>
+                <a:spcPts val="1600"/>
+              </a:spcAft>
+              <a:defRPr sz="1400">
+                <a:solidFill>
+                  <a:srgbClr val="505050"/>
+                </a:solidFill>
+              </a:defRPr>
+            </a:pPr>
+            <a:r>
+              <a:t>A web-based visitor management system for automated gate pass operations</a:t>
+            </a:r>
+          </a:p>
+          <a:p>
+            <a:pPr>
+              <a:defRPr sz="1800" b="1">
+                <a:solidFill>
+                  <a:srgbClr val="667EEA"/>
+                </a:solidFill>
+              </a:defRPr>
+            </a:pPr>
             <a:r>
               <a:t>Key Features</a:t>
             </a:r>
           </a:p>
           <a:p>
-            <a:r>
-              <a:t>🔐 Secure admin authentication</a:t>
-            </a:r>
-          </a:p>
-          <a:p>
-            <a:r>
-              <a:t>📝 Digital gate pass creation</a:t>
-            </a:r>
-          </a:p>
-          <a:p>
-            <a:r>
-              <a:t>✅ Real-time pass verification</a:t>
-            </a:r>
-          </a:p>
-          <a:p>
-            <a:r>
-              <a:t>📊 In-memory data management</a:t>
-            </a:r>
-          </a:p>
-          <a:p>
-            <a:r>
-              <a:t>🎨 Modern user interface</a:t>
-            </a:r>
-          </a:p>
-          <a:p>
+            <a:pPr>
+              <a:spcBef>
+                <a:spcPts val="600"/>
+              </a:spcBef>
+              <a:defRPr sz="1500">
+                <a:solidFill>
+                  <a:srgbClr val="505050"/>
+                </a:solidFill>
+              </a:defRPr>
+            </a:pPr>
+            <a:r>
+              <a:t>🔐 Secure Authentication</a:t>
+            </a:r>
+          </a:p>
+          <a:p>
+            <a:pPr>
+              <a:spcBef>
+                <a:spcPts val="600"/>
+              </a:spcBef>
+              <a:defRPr sz="1500">
+                <a:solidFill>
+                  <a:srgbClr val="505050"/>
+                </a:solidFill>
+              </a:defRPr>
+            </a:pPr>
+            <a:r>
+              <a:t>📝 Digital Pass Creation</a:t>
+            </a:r>
+          </a:p>
+          <a:p>
+            <a:pPr>
+              <a:spcBef>
+                <a:spcPts val="600"/>
+              </a:spcBef>
+              <a:defRPr sz="1500">
+                <a:solidFill>
+                  <a:srgbClr val="505050"/>
+                </a:solidFill>
+              </a:defRPr>
+            </a:pPr>
+            <a:r>
+              <a:t>✅ Real-time Verification</a:t>
+            </a:r>
+          </a:p>
+          <a:p>
+            <a:pPr>
+              <a:spcBef>
+                <a:spcPts val="600"/>
+              </a:spcBef>
+              <a:defRPr sz="1500">
+                <a:solidFill>
+                  <a:srgbClr val="505050"/>
+                </a:solidFill>
+              </a:defRPr>
+            </a:pPr>
+            <a:r>
+              <a:t>📊 Data Management</a:t>
+            </a:r>
+          </a:p>
+          <a:p>
+            <a:pPr>
+              <a:spcBef>
+                <a:spcPts val="600"/>
+              </a:spcBef>
+              <a:defRPr sz="1500">
+                <a:solidFill>
+                  <a:srgbClr val="505050"/>
+                </a:solidFill>
+              </a:defRPr>
+            </a:pPr>
+            <a:r>
+              <a:t>🎨 Modern UI</a:t>
+            </a:r>
+          </a:p>
+          <a:p>
+            <a:pPr>
+              <a:spcBef>
+                <a:spcPts val="1200"/>
+              </a:spcBef>
+              <a:defRPr sz="1800" b="1">
+                <a:solidFill>
+                  <a:srgbClr val="667EEA"/>
+                </a:solidFill>
+              </a:defRPr>
+            </a:pPr>
             <a:r>
               <a:t>Technology Stack</a:t>
             </a:r>
           </a:p>
           <a:p>
-            <a:r>
-              <a:t>Backend: Java Spring Boot 3.5.0</a:t>
-            </a:r>
-          </a:p>
-          <a:p>
-            <a:r>
-              <a:t>Frontend: HTML5 with modern CSS</a:t>
-            </a:r>
-          </a:p>
-          <a:p>
-            <a:r>
-              <a:t>Database: In-memory storage (prototype)</a:t>
-            </a:r>
-          </a:p>
-          <a:p>
-            <a:r>
-              <a:t>Server: Apache Tomcat</a:t>
+            <a:pPr>
+              <a:spcBef>
+                <a:spcPts val="400"/>
+              </a:spcBef>
+              <a:defRPr sz="1400">
+                <a:solidFill>
+                  <a:srgbClr val="505050"/>
+                </a:solidFill>
+              </a:defRPr>
+            </a:pPr>
+            <a:r>
+              <a:t>• Java Spring Boot 3.5.0</a:t>
+            </a:r>
+          </a:p>
+          <a:p>
+            <a:pPr>
+              <a:spcBef>
+                <a:spcPts val="400"/>
+              </a:spcBef>
+              <a:defRPr sz="1400">
+                <a:solidFill>
+                  <a:srgbClr val="505050"/>
+                </a:solidFill>
+              </a:defRPr>
+            </a:pPr>
+            <a:r>
+              <a:t>• HTML5 + Modern CSS</a:t>
+            </a:r>
+          </a:p>
+          <a:p>
+            <a:pPr>
+              <a:spcBef>
+                <a:spcPts val="400"/>
+              </a:spcBef>
+              <a:defRPr sz="1400">
+                <a:solidFill>
+                  <a:srgbClr val="505050"/>
+                </a:solidFill>
+              </a:defRPr>
+            </a:pPr>
+            <a:r>
+              <a:t>• In-Memory Storage</a:t>
+            </a:r>
+          </a:p>
+          <a:p>
+            <a:pPr>
+              <a:spcBef>
+                <a:spcPts val="400"/>
+              </a:spcBef>
+              <a:defRPr sz="1400">
+                <a:solidFill>
+                  <a:srgbClr val="505050"/>
+                </a:solidFill>
+              </a:defRPr>
+            </a:pPr>
+            <a:r>
+              <a:t>• Apache Tomcat</a:t>
             </a:r>
           </a:p>
         </p:txBody>
@@ -3392,6 +3953,22 @@
 <file path=ppt/slides/slide4.xml><?xml version="1.0" encoding="utf-8"?>
 <p:sld xmlns:a="http://schemas.openxmlformats.org/drawingml/2006/main" xmlns:p="http://schemas.openxmlformats.org/presentationml/2006/main" xmlns:r="http://schemas.openxmlformats.org/officeDocument/2006/relationships">
   <p:cSld>
+    <p:bg>
+      <p:bgPr>
+        <a:gradFill rotWithShape="1">
+          <a:gsLst>
+            <a:gs pos="0">
+              <a:srgbClr val="667EEA"/>
+            </a:gs>
+            <a:gs pos="100000">
+              <a:srgbClr val="764BA2"/>
+            </a:gs>
+          </a:gsLst>
+          <a:lin scaled="0" ang="18900000"/>
+        </a:gradFill>
+        <a:effectLst/>
+      </p:bgPr>
+    </p:bg>
     <p:spTree>
       <p:nvGrpSpPr>
         <p:cNvPr id="1" name=""/>
@@ -3401,19 +3978,52 @@
       <p:grpSpPr/>
       <p:sp>
         <p:nvSpPr>
-          <p:cNvPr id="2" name="Title 1"/>
-          <p:cNvSpPr>
-            <a:spLocks noGrp="1"/>
-          </p:cNvSpPr>
-          <p:nvPr>
-            <p:ph type="title"/>
-          </p:nvPr>
-        </p:nvSpPr>
-        <p:spPr/>
-        <p:txBody>
-          <a:bodyPr/>
-          <a:lstStyle/>
-          <a:p>
+          <p:cNvPr id="2" name="Rounded Rectangle 1"/>
+          <p:cNvSpPr/>
+          <p:nvPr/>
+        </p:nvSpPr>
+        <p:spPr>
+          <a:xfrm>
+            <a:off x="457200" y="457200"/>
+            <a:ext cx="8229600" cy="1371600"/>
+          </a:xfrm>
+          <a:prstGeom prst="roundRect">
+            <a:avLst/>
+          </a:prstGeom>
+          <a:solidFill>
+            <a:srgbClr val="FFFFFF"/>
+          </a:solidFill>
+          <a:ln w="38100">
+            <a:solidFill>
+              <a:srgbClr val="667EEA"/>
+            </a:solidFill>
+          </a:ln>
+        </p:spPr>
+        <p:style>
+          <a:lnRef idx="1">
+            <a:schemeClr val="accent1"/>
+          </a:lnRef>
+          <a:fillRef idx="3">
+            <a:schemeClr val="accent1"/>
+          </a:fillRef>
+          <a:effectRef idx="2">
+            <a:schemeClr val="accent1"/>
+          </a:effectRef>
+          <a:fontRef idx="minor">
+            <a:schemeClr val="lt1"/>
+          </a:fontRef>
+        </p:style>
+        <p:txBody>
+          <a:bodyPr rtlCol="0" anchor="ctr" wrap="square"/>
+          <a:lstStyle/>
+          <a:p>
+            <a:pPr algn="ctr">
+              <a:defRPr sz="3200" b="1">
+                <a:solidFill>
+                  <a:srgbClr val="667EEA"/>
+                </a:solidFill>
+              </a:defRPr>
+            </a:pPr>
             <a:r>
               <a:t>System Architecture</a:t>
             </a:r>
@@ -3422,71 +4032,399 @@
       </p:sp>
       <p:sp>
         <p:nvSpPr>
-          <p:cNvPr id="3" name="Content Placeholder 2"/>
-          <p:cNvSpPr>
-            <a:spLocks noGrp="1"/>
-          </p:cNvSpPr>
-          <p:nvPr>
-            <p:ph idx="1"/>
-          </p:nvPr>
-        </p:nvSpPr>
-        <p:spPr/>
-        <p:txBody>
-          <a:bodyPr/>
-          <a:lstStyle/>
-          <a:p>
-            <a:r>
-              <a:t>Components</a:t>
-            </a:r>
-          </a:p>
-          <a:p>
-            <a:r>
-              <a:t>User Interface (HTML/CSS/JS)</a:t>
-            </a:r>
-          </a:p>
-          <a:p>
-            <a:r>
-              <a:t>Controllers (Spring Boot)</a:t>
-            </a:r>
-          </a:p>
-          <a:p>
-            <a:r>
-              <a:t>Business Logic (Java Models)</a:t>
-            </a:r>
-          </a:p>
-          <a:p>
-            <a:r>
-              <a:t>Data Storage (In-Memory)</a:t>
-            </a:r>
-          </a:p>
-          <a:p>
-            <a:r>
-              <a:t>User Flow</a:t>
-            </a:r>
-          </a:p>
-          <a:p>
-            <a:r>
-              <a:t>1. Admin login with credentials</a:t>
-            </a:r>
-          </a:p>
-          <a:p>
-            <a:r>
-              <a:t>2. Create visitor gate pass</a:t>
-            </a:r>
-          </a:p>
-          <a:p>
-            <a:r>
-              <a:t>3. System generates unique pass ID</a:t>
-            </a:r>
-          </a:p>
-          <a:p>
-            <a:r>
-              <a:t>4. Security personnel verify pass</a:t>
-            </a:r>
-          </a:p>
-          <a:p>
-            <a:r>
-              <a:t>5. Real-time validation response</a:t>
+          <p:cNvPr id="3" name="Rounded Rectangle 2"/>
+          <p:cNvSpPr/>
+          <p:nvPr/>
+        </p:nvSpPr>
+        <p:spPr>
+          <a:xfrm>
+            <a:off x="1828800" y="2286000"/>
+            <a:ext cx="5486400" cy="640080"/>
+          </a:xfrm>
+          <a:prstGeom prst="roundRect">
+            <a:avLst/>
+          </a:prstGeom>
+          <a:solidFill>
+            <a:srgbClr val="FFFFFF"/>
+          </a:solidFill>
+          <a:ln w="25400">
+            <a:solidFill>
+              <a:srgbClr val="667EEA"/>
+            </a:solidFill>
+          </a:ln>
+        </p:spPr>
+        <p:style>
+          <a:lnRef idx="1">
+            <a:schemeClr val="accent1"/>
+          </a:lnRef>
+          <a:fillRef idx="3">
+            <a:schemeClr val="accent1"/>
+          </a:fillRef>
+          <a:effectRef idx="2">
+            <a:schemeClr val="accent1"/>
+          </a:effectRef>
+          <a:fontRef idx="minor">
+            <a:schemeClr val="lt1"/>
+          </a:fontRef>
+        </p:style>
+        <p:txBody>
+          <a:bodyPr rtlCol="0" anchor="ctr"/>
+          <a:lstStyle/>
+          <a:p>
+            <a:pPr algn="ctr">
+              <a:defRPr sz="1600" b="1">
+                <a:solidFill>
+                  <a:srgbClr val="667EEA"/>
+                </a:solidFill>
+              </a:defRPr>
+            </a:pPr>
+            <a:r>
+              <a:t>User Interface</a:t>
+            </a:r>
+          </a:p>
+        </p:txBody>
+      </p:sp>
+      <p:sp>
+        <p:nvSpPr>
+          <p:cNvPr id="4" name="Rounded Rectangle 3"/>
+          <p:cNvSpPr/>
+          <p:nvPr/>
+        </p:nvSpPr>
+        <p:spPr>
+          <a:xfrm>
+            <a:off x="1828800" y="3200400"/>
+            <a:ext cx="5486400" cy="640080"/>
+          </a:xfrm>
+          <a:prstGeom prst="roundRect">
+            <a:avLst/>
+          </a:prstGeom>
+          <a:solidFill>
+            <a:srgbClr val="FFFFFF"/>
+          </a:solidFill>
+          <a:ln w="25400">
+            <a:solidFill>
+              <a:srgbClr val="667EEA"/>
+            </a:solidFill>
+          </a:ln>
+        </p:spPr>
+        <p:style>
+          <a:lnRef idx="1">
+            <a:schemeClr val="accent1"/>
+          </a:lnRef>
+          <a:fillRef idx="3">
+            <a:schemeClr val="accent1"/>
+          </a:fillRef>
+          <a:effectRef idx="2">
+            <a:schemeClr val="accent1"/>
+          </a:effectRef>
+          <a:fontRef idx="minor">
+            <a:schemeClr val="lt1"/>
+          </a:fontRef>
+        </p:style>
+        <p:txBody>
+          <a:bodyPr rtlCol="0" anchor="ctr"/>
+          <a:lstStyle/>
+          <a:p>
+            <a:pPr algn="ctr">
+              <a:defRPr sz="1600" b="1">
+                <a:solidFill>
+                  <a:srgbClr val="667EEA"/>
+                </a:solidFill>
+              </a:defRPr>
+            </a:pPr>
+            <a:r>
+              <a:t>Controllers</a:t>
+            </a:r>
+          </a:p>
+        </p:txBody>
+      </p:sp>
+      <p:sp>
+        <p:nvSpPr>
+          <p:cNvPr id="5" name="Rounded Rectangle 4"/>
+          <p:cNvSpPr/>
+          <p:nvPr/>
+        </p:nvSpPr>
+        <p:spPr>
+          <a:xfrm>
+            <a:off x="1828800" y="4114800"/>
+            <a:ext cx="5486400" cy="640080"/>
+          </a:xfrm>
+          <a:prstGeom prst="roundRect">
+            <a:avLst/>
+          </a:prstGeom>
+          <a:solidFill>
+            <a:srgbClr val="FFFFFF"/>
+          </a:solidFill>
+          <a:ln w="25400">
+            <a:solidFill>
+              <a:srgbClr val="667EEA"/>
+            </a:solidFill>
+          </a:ln>
+        </p:spPr>
+        <p:style>
+          <a:lnRef idx="1">
+            <a:schemeClr val="accent1"/>
+          </a:lnRef>
+          <a:fillRef idx="3">
+            <a:schemeClr val="accent1"/>
+          </a:fillRef>
+          <a:effectRef idx="2">
+            <a:schemeClr val="accent1"/>
+          </a:effectRef>
+          <a:fontRef idx="minor">
+            <a:schemeClr val="lt1"/>
+          </a:fontRef>
+        </p:style>
+        <p:txBody>
+          <a:bodyPr rtlCol="0" anchor="ctr"/>
+          <a:lstStyle/>
+          <a:p>
+            <a:pPr algn="ctr">
+              <a:defRPr sz="1600" b="1">
+                <a:solidFill>
+                  <a:srgbClr val="667EEA"/>
+                </a:solidFill>
+              </a:defRPr>
+            </a:pPr>
+            <a:r>
+              <a:t>Business Logic</a:t>
+            </a:r>
+          </a:p>
+        </p:txBody>
+      </p:sp>
+      <p:sp>
+        <p:nvSpPr>
+          <p:cNvPr id="6" name="Rounded Rectangle 5"/>
+          <p:cNvSpPr/>
+          <p:nvPr/>
+        </p:nvSpPr>
+        <p:spPr>
+          <a:xfrm>
+            <a:off x="1828800" y="5029200"/>
+            <a:ext cx="5486400" cy="640080"/>
+          </a:xfrm>
+          <a:prstGeom prst="roundRect">
+            <a:avLst/>
+          </a:prstGeom>
+          <a:solidFill>
+            <a:srgbClr val="FFFFFF"/>
+          </a:solidFill>
+          <a:ln w="25400">
+            <a:solidFill>
+              <a:srgbClr val="667EEA"/>
+            </a:solidFill>
+          </a:ln>
+        </p:spPr>
+        <p:style>
+          <a:lnRef idx="1">
+            <a:schemeClr val="accent1"/>
+          </a:lnRef>
+          <a:fillRef idx="3">
+            <a:schemeClr val="accent1"/>
+          </a:fillRef>
+          <a:effectRef idx="2">
+            <a:schemeClr val="accent1"/>
+          </a:effectRef>
+          <a:fontRef idx="minor">
+            <a:schemeClr val="lt1"/>
+          </a:fontRef>
+        </p:style>
+        <p:txBody>
+          <a:bodyPr rtlCol="0" anchor="ctr"/>
+          <a:lstStyle/>
+          <a:p>
+            <a:pPr algn="ctr">
+              <a:defRPr sz="1600" b="1">
+                <a:solidFill>
+                  <a:srgbClr val="667EEA"/>
+                </a:solidFill>
+              </a:defRPr>
+            </a:pPr>
+            <a:r>
+              <a:t>Data Storage</a:t>
+            </a:r>
+          </a:p>
+        </p:txBody>
+      </p:sp>
+      <p:sp>
+        <p:nvSpPr>
+          <p:cNvPr id="7" name="Down Arrow 6"/>
+          <p:cNvSpPr/>
+          <p:nvPr/>
+        </p:nvSpPr>
+        <p:spPr>
+          <a:xfrm>
+            <a:off x="4572000" y="2926080"/>
+            <a:ext cx="274320" cy="274320"/>
+          </a:xfrm>
+          <a:prstGeom prst="downArrow">
+            <a:avLst/>
+          </a:prstGeom>
+          <a:solidFill>
+            <a:srgbClr val="667EEA"/>
+          </a:solidFill>
+          <a:ln>
+            <a:noFill/>
+          </a:ln>
+        </p:spPr>
+        <p:style>
+          <a:lnRef idx="1">
+            <a:schemeClr val="accent1"/>
+          </a:lnRef>
+          <a:fillRef idx="3">
+            <a:schemeClr val="accent1"/>
+          </a:fillRef>
+          <a:effectRef idx="2">
+            <a:schemeClr val="accent1"/>
+          </a:effectRef>
+          <a:fontRef idx="minor">
+            <a:schemeClr val="lt1"/>
+          </a:fontRef>
+        </p:style>
+        <p:txBody>
+          <a:bodyPr rtlCol="0" anchor="ctr"/>
+          <a:lstStyle/>
+          <a:p>
+            <a:pPr algn="ctr"/>
+          </a:p>
+        </p:txBody>
+      </p:sp>
+      <p:sp>
+        <p:nvSpPr>
+          <p:cNvPr id="8" name="Down Arrow 7"/>
+          <p:cNvSpPr/>
+          <p:nvPr/>
+        </p:nvSpPr>
+        <p:spPr>
+          <a:xfrm>
+            <a:off x="4572000" y="3840480"/>
+            <a:ext cx="274320" cy="274320"/>
+          </a:xfrm>
+          <a:prstGeom prst="downArrow">
+            <a:avLst/>
+          </a:prstGeom>
+          <a:solidFill>
+            <a:srgbClr val="667EEA"/>
+          </a:solidFill>
+          <a:ln>
+            <a:noFill/>
+          </a:ln>
+        </p:spPr>
+        <p:style>
+          <a:lnRef idx="1">
+            <a:schemeClr val="accent1"/>
+          </a:lnRef>
+          <a:fillRef idx="3">
+            <a:schemeClr val="accent1"/>
+          </a:fillRef>
+          <a:effectRef idx="2">
+            <a:schemeClr val="accent1"/>
+          </a:effectRef>
+          <a:fontRef idx="minor">
+            <a:schemeClr val="lt1"/>
+          </a:fontRef>
+        </p:style>
+        <p:txBody>
+          <a:bodyPr rtlCol="0" anchor="ctr"/>
+          <a:lstStyle/>
+          <a:p>
+            <a:pPr algn="ctr"/>
+          </a:p>
+        </p:txBody>
+      </p:sp>
+      <p:sp>
+        <p:nvSpPr>
+          <p:cNvPr id="9" name="Down Arrow 8"/>
+          <p:cNvSpPr/>
+          <p:nvPr/>
+        </p:nvSpPr>
+        <p:spPr>
+          <a:xfrm>
+            <a:off x="4572000" y="4754880"/>
+            <a:ext cx="274320" cy="274320"/>
+          </a:xfrm>
+          <a:prstGeom prst="downArrow">
+            <a:avLst/>
+          </a:prstGeom>
+          <a:solidFill>
+            <a:srgbClr val="667EEA"/>
+          </a:solidFill>
+          <a:ln>
+            <a:noFill/>
+          </a:ln>
+        </p:spPr>
+        <p:style>
+          <a:lnRef idx="1">
+            <a:schemeClr val="accent1"/>
+          </a:lnRef>
+          <a:fillRef idx="3">
+            <a:schemeClr val="accent1"/>
+          </a:fillRef>
+          <a:effectRef idx="2">
+            <a:schemeClr val="accent1"/>
+          </a:effectRef>
+          <a:fontRef idx="minor">
+            <a:schemeClr val="lt1"/>
+          </a:fontRef>
+        </p:style>
+        <p:txBody>
+          <a:bodyPr rtlCol="0" anchor="ctr"/>
+          <a:lstStyle/>
+          <a:p>
+            <a:pPr algn="ctr"/>
+          </a:p>
+        </p:txBody>
+      </p:sp>
+      <p:sp>
+        <p:nvSpPr>
+          <p:cNvPr id="10" name="Rounded Rectangle 9"/>
+          <p:cNvSpPr/>
+          <p:nvPr/>
+        </p:nvSpPr>
+        <p:spPr>
+          <a:xfrm>
+            <a:off x="457200" y="5943600"/>
+            <a:ext cx="8229600" cy="731520"/>
+          </a:xfrm>
+          <a:prstGeom prst="roundRect">
+            <a:avLst/>
+          </a:prstGeom>
+          <a:solidFill>
+            <a:srgbClr val="FFFFFF"/>
+          </a:solidFill>
+          <a:ln w="25400">
+            <a:solidFill>
+              <a:srgbClr val="C8C8C8"/>
+            </a:solidFill>
+          </a:ln>
+        </p:spPr>
+        <p:style>
+          <a:lnRef idx="1">
+            <a:schemeClr val="accent1"/>
+          </a:lnRef>
+          <a:fillRef idx="3">
+            <a:schemeClr val="accent1"/>
+          </a:fillRef>
+          <a:effectRef idx="2">
+            <a:schemeClr val="accent1"/>
+          </a:effectRef>
+          <a:fontRef idx="minor">
+            <a:schemeClr val="lt1"/>
+          </a:fontRef>
+        </p:style>
+        <p:txBody>
+          <a:bodyPr rtlCol="0" anchor="ctr" wrap="square" lIns="182880" rIns="182880" tIns="182880" bIns="182880"/>
+          <a:lstStyle/>
+          <a:p>
+            <a:pPr algn="ctr">
+              <a:defRPr sz="1400">
+                <a:solidFill>
+                  <a:srgbClr val="505050"/>
+                </a:solidFill>
+              </a:defRPr>
+            </a:pPr>
+            <a:r>
+              <a:t>User Flow: Login → Create Pass → Generate ID → Verify Pass → Validation</a:t>
             </a:r>
           </a:p>
         </p:txBody>
@@ -3502,6 +4440,22 @@
 <file path=ppt/slides/slide5.xml><?xml version="1.0" encoding="utf-8"?>
 <p:sld xmlns:a="http://schemas.openxmlformats.org/drawingml/2006/main" xmlns:p="http://schemas.openxmlformats.org/presentationml/2006/main" xmlns:r="http://schemas.openxmlformats.org/officeDocument/2006/relationships">
   <p:cSld>
+    <p:bg>
+      <p:bgPr>
+        <a:gradFill rotWithShape="1">
+          <a:gsLst>
+            <a:gs pos="0">
+              <a:srgbClr val="667EEA"/>
+            </a:gs>
+            <a:gs pos="100000">
+              <a:srgbClr val="764BA2"/>
+            </a:gs>
+          </a:gsLst>
+          <a:lin scaled="0" ang="18900000"/>
+        </a:gradFill>
+        <a:effectLst/>
+      </p:bgPr>
+    </p:bg>
     <p:spTree>
       <p:nvGrpSpPr>
         <p:cNvPr id="1" name=""/>
@@ -3511,19 +4465,52 @@
       <p:grpSpPr/>
       <p:sp>
         <p:nvSpPr>
-          <p:cNvPr id="2" name="Title 1"/>
-          <p:cNvSpPr>
-            <a:spLocks noGrp="1"/>
-          </p:cNvSpPr>
-          <p:nvPr>
-            <p:ph type="title"/>
-          </p:nvPr>
-        </p:nvSpPr>
-        <p:spPr/>
-        <p:txBody>
-          <a:bodyPr/>
-          <a:lstStyle/>
-          <a:p>
+          <p:cNvPr id="2" name="Rounded Rectangle 1"/>
+          <p:cNvSpPr/>
+          <p:nvPr/>
+        </p:nvSpPr>
+        <p:spPr>
+          <a:xfrm>
+            <a:off x="457200" y="457200"/>
+            <a:ext cx="8229600" cy="1371600"/>
+          </a:xfrm>
+          <a:prstGeom prst="roundRect">
+            <a:avLst/>
+          </a:prstGeom>
+          <a:solidFill>
+            <a:srgbClr val="FFFFFF"/>
+          </a:solidFill>
+          <a:ln w="38100">
+            <a:solidFill>
+              <a:srgbClr val="667EEA"/>
+            </a:solidFill>
+          </a:ln>
+        </p:spPr>
+        <p:style>
+          <a:lnRef idx="1">
+            <a:schemeClr val="accent1"/>
+          </a:lnRef>
+          <a:fillRef idx="3">
+            <a:schemeClr val="accent1"/>
+          </a:fillRef>
+          <a:effectRef idx="2">
+            <a:schemeClr val="accent1"/>
+          </a:effectRef>
+          <a:fontRef idx="minor">
+            <a:schemeClr val="lt1"/>
+          </a:fontRef>
+        </p:style>
+        <p:txBody>
+          <a:bodyPr rtlCol="0" anchor="ctr" wrap="square"/>
+          <a:lstStyle/>
+          <a:p>
+            <a:pPr algn="ctr">
+              <a:defRPr sz="3200" b="1">
+                <a:solidFill>
+                  <a:srgbClr val="667EEA"/>
+                </a:solidFill>
+              </a:defRPr>
+            </a:pPr>
             <a:r>
               <a:t>Key Features &amp; Demo</a:t>
             </a:r>
@@ -3532,86 +4519,360 @@
       </p:sp>
       <p:sp>
         <p:nvSpPr>
-          <p:cNvPr id="3" name="Content Placeholder 2"/>
-          <p:cNvSpPr>
-            <a:spLocks noGrp="1"/>
-          </p:cNvSpPr>
-          <p:nvPr>
-            <p:ph idx="1"/>
-          </p:nvPr>
-        </p:nvSpPr>
-        <p:spPr/>
-        <p:txBody>
-          <a:bodyPr/>
-          <a:lstStyle/>
-          <a:p>
-            <a:r>
-              <a:t>Authentication System</a:t>
-            </a:r>
-          </a:p>
-          <a:p>
-            <a:r>
-              <a:t>Username: admin, Password: admin123</a:t>
-            </a:r>
-          </a:p>
-          <a:p>
-            <a:r>
-              <a:t>Secure session management</a:t>
-            </a:r>
-          </a:p>
-          <a:p>
-            <a:r>
-              <a:t>Error handling and feedback</a:t>
-            </a:r>
-          </a:p>
-          <a:p>
-            <a:r>
-              <a:t>Gate Pass Creation</a:t>
-            </a:r>
-          </a:p>
-          <a:p>
-            <a:r>
-              <a:t>Visitor name input</a:t>
-            </a:r>
-          </a:p>
-          <a:p>
-            <a:r>
-              <a:t>Purpose of visit</a:t>
-            </a:r>
-          </a:p>
-          <a:p>
-            <a:r>
-              <a:t>Automatic pass ID generation</a:t>
-            </a:r>
-          </a:p>
-          <a:p>
-            <a:r>
-              <a:t>Success confirmation</a:t>
-            </a:r>
-          </a:p>
-          <a:p>
-            <a:r>
-              <a:t>Pass Verification</a:t>
-            </a:r>
-          </a:p>
-          <a:p>
-            <a:r>
-              <a:t>Pass ID validation</a:t>
-            </a:r>
-          </a:p>
-          <a:p>
-            <a:r>
-              <a:t>Instant status check</a:t>
-            </a:r>
-          </a:p>
-          <a:p>
-            <a:r>
-              <a:t>Visitor information display</a:t>
-            </a:r>
-          </a:p>
-          <a:p>
-            <a:r>
-              <a:t>Invalid pass handling</a:t>
+          <p:cNvPr id="3" name="Rounded Rectangle 2"/>
+          <p:cNvSpPr/>
+          <p:nvPr/>
+        </p:nvSpPr>
+        <p:spPr>
+          <a:xfrm>
+            <a:off x="457200" y="2011680"/>
+            <a:ext cx="2560320" cy="2286000"/>
+          </a:xfrm>
+          <a:prstGeom prst="roundRect">
+            <a:avLst/>
+          </a:prstGeom>
+          <a:solidFill>
+            <a:srgbClr val="FFFFFF"/>
+          </a:solidFill>
+          <a:ln w="25400">
+            <a:solidFill>
+              <a:srgbClr val="667EEA"/>
+            </a:solidFill>
+          </a:ln>
+        </p:spPr>
+        <p:style>
+          <a:lnRef idx="1">
+            <a:schemeClr val="accent1"/>
+          </a:lnRef>
+          <a:fillRef idx="3">
+            <a:schemeClr val="accent1"/>
+          </a:fillRef>
+          <a:effectRef idx="2">
+            <a:schemeClr val="accent1"/>
+          </a:effectRef>
+          <a:fontRef idx="minor">
+            <a:schemeClr val="lt1"/>
+          </a:fontRef>
+        </p:style>
+        <p:txBody>
+          <a:bodyPr rtlCol="0" anchor="ctr"/>
+          <a:lstStyle/>
+          <a:p>
+            <a:pPr algn="ctr">
+              <a:spcAft>
+                <a:spcPts val="800"/>
+              </a:spcAft>
+              <a:defRPr sz="1600" b="1">
+                <a:solidFill>
+                  <a:srgbClr val="667EEA"/>
+                </a:solidFill>
+              </a:defRPr>
+            </a:pPr>
+            <a:r>
+              <a:t>Authentication</a:t>
+            </a:r>
+          </a:p>
+          <a:p>
+            <a:pPr algn="ctr">
+              <a:spcBef>
+                <a:spcPts val="400"/>
+              </a:spcBef>
+              <a:defRPr sz="1200">
+                <a:solidFill>
+                  <a:srgbClr val="505050"/>
+                </a:solidFill>
+              </a:defRPr>
+            </a:pPr>
+            <a:r>
+              <a:t>admin/admin123</a:t>
+            </a:r>
+          </a:p>
+          <a:p>
+            <a:pPr algn="ctr">
+              <a:spcBef>
+                <a:spcPts val="400"/>
+              </a:spcBef>
+              <a:defRPr sz="1200">
+                <a:solidFill>
+                  <a:srgbClr val="505050"/>
+                </a:solidFill>
+              </a:defRPr>
+            </a:pPr>
+            <a:r>
+              <a:t>Secure login</a:t>
+            </a:r>
+          </a:p>
+          <a:p>
+            <a:pPr algn="ctr">
+              <a:spcBef>
+                <a:spcPts val="400"/>
+              </a:spcBef>
+              <a:defRPr sz="1200">
+                <a:solidFill>
+                  <a:srgbClr val="505050"/>
+                </a:solidFill>
+              </a:defRPr>
+            </a:pPr>
+            <a:r>
+              <a:t>Error handling</a:t>
+            </a:r>
+          </a:p>
+        </p:txBody>
+      </p:sp>
+      <p:sp>
+        <p:nvSpPr>
+          <p:cNvPr id="4" name="Rounded Rectangle 3"/>
+          <p:cNvSpPr/>
+          <p:nvPr/>
+        </p:nvSpPr>
+        <p:spPr>
+          <a:xfrm>
+            <a:off x="3200400" y="2011680"/>
+            <a:ext cx="2560320" cy="2286000"/>
+          </a:xfrm>
+          <a:prstGeom prst="roundRect">
+            <a:avLst/>
+          </a:prstGeom>
+          <a:solidFill>
+            <a:srgbClr val="FFFFFF"/>
+          </a:solidFill>
+          <a:ln w="25400">
+            <a:solidFill>
+              <a:srgbClr val="667EEA"/>
+            </a:solidFill>
+          </a:ln>
+        </p:spPr>
+        <p:style>
+          <a:lnRef idx="1">
+            <a:schemeClr val="accent1"/>
+          </a:lnRef>
+          <a:fillRef idx="3">
+            <a:schemeClr val="accent1"/>
+          </a:fillRef>
+          <a:effectRef idx="2">
+            <a:schemeClr val="accent1"/>
+          </a:effectRef>
+          <a:fontRef idx="minor">
+            <a:schemeClr val="lt1"/>
+          </a:fontRef>
+        </p:style>
+        <p:txBody>
+          <a:bodyPr rtlCol="0" anchor="ctr"/>
+          <a:lstStyle/>
+          <a:p>
+            <a:pPr algn="ctr">
+              <a:spcAft>
+                <a:spcPts val="800"/>
+              </a:spcAft>
+              <a:defRPr sz="1600" b="1">
+                <a:solidFill>
+                  <a:srgbClr val="667EEA"/>
+                </a:solidFill>
+              </a:defRPr>
+            </a:pPr>
+            <a:r>
+              <a:t>Pass Creation</a:t>
+            </a:r>
+          </a:p>
+          <a:p>
+            <a:pPr algn="ctr">
+              <a:spcBef>
+                <a:spcPts val="400"/>
+              </a:spcBef>
+              <a:defRPr sz="1200">
+                <a:solidFill>
+                  <a:srgbClr val="505050"/>
+                </a:solidFill>
+              </a:defRPr>
+            </a:pPr>
+            <a:r>
+              <a:t>Visitor details</a:t>
+            </a:r>
+          </a:p>
+          <a:p>
+            <a:pPr algn="ctr">
+              <a:spcBef>
+                <a:spcPts val="400"/>
+              </a:spcBef>
+              <a:defRPr sz="1200">
+                <a:solidFill>
+                  <a:srgbClr val="505050"/>
+                </a:solidFill>
+              </a:defRPr>
+            </a:pPr>
+            <a:r>
+              <a:t>Auto ID generation</a:t>
+            </a:r>
+          </a:p>
+          <a:p>
+            <a:pPr algn="ctr">
+              <a:spcBef>
+                <a:spcPts val="400"/>
+              </a:spcBef>
+              <a:defRPr sz="1200">
+                <a:solidFill>
+                  <a:srgbClr val="505050"/>
+                </a:solidFill>
+              </a:defRPr>
+            </a:pPr>
+            <a:r>
+              <a:t>Success feedback</a:t>
+            </a:r>
+          </a:p>
+        </p:txBody>
+      </p:sp>
+      <p:sp>
+        <p:nvSpPr>
+          <p:cNvPr id="5" name="Rounded Rectangle 4"/>
+          <p:cNvSpPr/>
+          <p:nvPr/>
+        </p:nvSpPr>
+        <p:spPr>
+          <a:xfrm>
+            <a:off x="5943600" y="2011680"/>
+            <a:ext cx="2560320" cy="2286000"/>
+          </a:xfrm>
+          <a:prstGeom prst="roundRect">
+            <a:avLst/>
+          </a:prstGeom>
+          <a:solidFill>
+            <a:srgbClr val="FFFFFF"/>
+          </a:solidFill>
+          <a:ln w="25400">
+            <a:solidFill>
+              <a:srgbClr val="667EEA"/>
+            </a:solidFill>
+          </a:ln>
+        </p:spPr>
+        <p:style>
+          <a:lnRef idx="1">
+            <a:schemeClr val="accent1"/>
+          </a:lnRef>
+          <a:fillRef idx="3">
+            <a:schemeClr val="accent1"/>
+          </a:fillRef>
+          <a:effectRef idx="2">
+            <a:schemeClr val="accent1"/>
+          </a:effectRef>
+          <a:fontRef idx="minor">
+            <a:schemeClr val="lt1"/>
+          </a:fontRef>
+        </p:style>
+        <p:txBody>
+          <a:bodyPr rtlCol="0" anchor="ctr"/>
+          <a:lstStyle/>
+          <a:p>
+            <a:pPr algn="ctr">
+              <a:spcAft>
+                <a:spcPts val="800"/>
+              </a:spcAft>
+              <a:defRPr sz="1600" b="1">
+                <a:solidFill>
+                  <a:srgbClr val="667EEA"/>
+                </a:solidFill>
+              </a:defRPr>
+            </a:pPr>
+            <a:r>
+              <a:t>Verification</a:t>
+            </a:r>
+          </a:p>
+          <a:p>
+            <a:pPr algn="ctr">
+              <a:spcBef>
+                <a:spcPts val="400"/>
+              </a:spcBef>
+              <a:defRPr sz="1200">
+                <a:solidFill>
+                  <a:srgbClr val="505050"/>
+                </a:solidFill>
+              </a:defRPr>
+            </a:pPr>
+            <a:r>
+              <a:t>Real-time validation</a:t>
+            </a:r>
+          </a:p>
+          <a:p>
+            <a:pPr algn="ctr">
+              <a:spcBef>
+                <a:spcPts val="400"/>
+              </a:spcBef>
+              <a:defRPr sz="1200">
+                <a:solidFill>
+                  <a:srgbClr val="505050"/>
+                </a:solidFill>
+              </a:defRPr>
+            </a:pPr>
+            <a:r>
+              <a:t>Instant status</a:t>
+            </a:r>
+          </a:p>
+          <a:p>
+            <a:pPr algn="ctr">
+              <a:spcBef>
+                <a:spcPts val="400"/>
+              </a:spcBef>
+              <a:defRPr sz="1200">
+                <a:solidFill>
+                  <a:srgbClr val="505050"/>
+                </a:solidFill>
+              </a:defRPr>
+            </a:pPr>
+            <a:r>
+              <a:t>Visitor info display</a:t>
+            </a:r>
+          </a:p>
+        </p:txBody>
+      </p:sp>
+      <p:sp>
+        <p:nvSpPr>
+          <p:cNvPr id="6" name="Rounded Rectangle 5"/>
+          <p:cNvSpPr/>
+          <p:nvPr/>
+        </p:nvSpPr>
+        <p:spPr>
+          <a:xfrm>
+            <a:off x="457200" y="4572000"/>
+            <a:ext cx="8229600" cy="1645920"/>
+          </a:xfrm>
+          <a:prstGeom prst="roundRect">
+            <a:avLst/>
+          </a:prstGeom>
+          <a:solidFill>
+            <a:srgbClr val="FFFFFF"/>
+          </a:solidFill>
+          <a:ln w="25400">
+            <a:solidFill>
+              <a:srgbClr val="C8C8C8"/>
+            </a:solidFill>
+          </a:ln>
+        </p:spPr>
+        <p:style>
+          <a:lnRef idx="1">
+            <a:schemeClr val="accent1"/>
+          </a:lnRef>
+          <a:fillRef idx="3">
+            <a:schemeClr val="accent1"/>
+          </a:fillRef>
+          <a:effectRef idx="2">
+            <a:schemeClr val="accent1"/>
+          </a:effectRef>
+          <a:fontRef idx="minor">
+            <a:schemeClr val="lt1"/>
+          </a:fontRef>
+        </p:style>
+        <p:txBody>
+          <a:bodyPr rtlCol="0" anchor="ctr" wrap="square" lIns="182880" rIns="182880" tIns="182880" bIns="182880"/>
+          <a:lstStyle/>
+          <a:p>
+            <a:pPr algn="ctr">
+              <a:defRPr sz="1600" b="1">
+                <a:solidFill>
+                  <a:srgbClr val="667EEA"/>
+                </a:solidFill>
+              </a:defRPr>
+            </a:pPr>
+            <a:r>
+              <a:t>UI Highlights: Modern gradient design • Responsive layout • Intuitive navigation • Real-time feedback</a:t>
             </a:r>
           </a:p>
         </p:txBody>
@@ -3627,6 +4888,22 @@
 <file path=ppt/slides/slide6.xml><?xml version="1.0" encoding="utf-8"?>
 <p:sld xmlns:a="http://schemas.openxmlformats.org/drawingml/2006/main" xmlns:p="http://schemas.openxmlformats.org/presentationml/2006/main" xmlns:r="http://schemas.openxmlformats.org/officeDocument/2006/relationships">
   <p:cSld>
+    <p:bg>
+      <p:bgPr>
+        <a:gradFill rotWithShape="1">
+          <a:gsLst>
+            <a:gs pos="0">
+              <a:srgbClr val="667EEA"/>
+            </a:gs>
+            <a:gs pos="100000">
+              <a:srgbClr val="764BA2"/>
+            </a:gs>
+          </a:gsLst>
+          <a:lin scaled="0" ang="18900000"/>
+        </a:gradFill>
+        <a:effectLst/>
+      </p:bgPr>
+    </p:bg>
     <p:spTree>
       <p:nvGrpSpPr>
         <p:cNvPr id="1" name=""/>
@@ -3636,19 +4913,52 @@
       <p:grpSpPr/>
       <p:sp>
         <p:nvSpPr>
-          <p:cNvPr id="2" name="Title 1"/>
-          <p:cNvSpPr>
-            <a:spLocks noGrp="1"/>
-          </p:cNvSpPr>
-          <p:nvPr>
-            <p:ph type="title"/>
-          </p:nvPr>
-        </p:nvSpPr>
-        <p:spPr/>
-        <p:txBody>
-          <a:bodyPr/>
-          <a:lstStyle/>
-          <a:p>
+          <p:cNvPr id="2" name="Rounded Rectangle 1"/>
+          <p:cNvSpPr/>
+          <p:nvPr/>
+        </p:nvSpPr>
+        <p:spPr>
+          <a:xfrm>
+            <a:off x="457200" y="457200"/>
+            <a:ext cx="8229600" cy="1371600"/>
+          </a:xfrm>
+          <a:prstGeom prst="roundRect">
+            <a:avLst/>
+          </a:prstGeom>
+          <a:solidFill>
+            <a:srgbClr val="FFFFFF"/>
+          </a:solidFill>
+          <a:ln w="38100">
+            <a:solidFill>
+              <a:srgbClr val="667EEA"/>
+            </a:solidFill>
+          </a:ln>
+        </p:spPr>
+        <p:style>
+          <a:lnRef idx="1">
+            <a:schemeClr val="accent1"/>
+          </a:lnRef>
+          <a:fillRef idx="3">
+            <a:schemeClr val="accent1"/>
+          </a:fillRef>
+          <a:effectRef idx="2">
+            <a:schemeClr val="accent1"/>
+          </a:effectRef>
+          <a:fontRef idx="minor">
+            <a:schemeClr val="lt1"/>
+          </a:fontRef>
+        </p:style>
+        <p:txBody>
+          <a:bodyPr rtlCol="0" anchor="ctr" wrap="square"/>
+          <a:lstStyle/>
+          <a:p>
+            <a:pPr algn="ctr">
+              <a:defRPr sz="3200" b="1">
+                <a:solidFill>
+                  <a:srgbClr val="667EEA"/>
+                </a:solidFill>
+              </a:defRPr>
+            </a:pPr>
             <a:r>
               <a:t>Future Enhancements &amp; Conclusion</a:t>
             </a:r>
@@ -3657,17 +4967,43 @@
       </p:sp>
       <p:sp>
         <p:nvSpPr>
-          <p:cNvPr id="3" name="Content Placeholder 2"/>
-          <p:cNvSpPr>
-            <a:spLocks noGrp="1"/>
-          </p:cNvSpPr>
-          <p:nvPr>
-            <p:ph idx="1"/>
-          </p:nvPr>
-        </p:nvSpPr>
-        <p:spPr/>
-        <p:txBody>
-          <a:bodyPr/>
+          <p:cNvPr id="3" name="Rounded Rectangle 2"/>
+          <p:cNvSpPr/>
+          <p:nvPr/>
+        </p:nvSpPr>
+        <p:spPr>
+          <a:xfrm>
+            <a:off x="457200" y="2011680"/>
+            <a:ext cx="3840480" cy="4114800"/>
+          </a:xfrm>
+          <a:prstGeom prst="roundRect">
+            <a:avLst/>
+          </a:prstGeom>
+          <a:solidFill>
+            <a:srgbClr val="FFFFFF"/>
+          </a:solidFill>
+          <a:ln w="25400">
+            <a:solidFill>
+              <a:srgbClr val="C8C8C8"/>
+            </a:solidFill>
+          </a:ln>
+        </p:spPr>
+        <p:style>
+          <a:lnRef idx="1">
+            <a:schemeClr val="accent1"/>
+          </a:lnRef>
+          <a:fillRef idx="3">
+            <a:schemeClr val="accent1"/>
+          </a:fillRef>
+          <a:effectRef idx="2">
+            <a:schemeClr val="accent1"/>
+          </a:effectRef>
+          <a:fontRef idx="minor">
+            <a:schemeClr val="lt1"/>
+          </a:fontRef>
+        </p:style>
+        <p:txBody>
+          <a:bodyPr rtlCol="0" anchor="ctr" wrap="square" lIns="182880" rIns="182880" tIns="182880" bIns="182880"/>
           <a:lstStyle/>
           <a:p>
             <a:r>
@@ -3675,88 +5011,297 @@
             </a:r>
           </a:p>
           <a:p>
-            <a:r>
-              <a:t>🗄️ MySQL database integration</a:t>
-            </a:r>
-          </a:p>
-          <a:p>
-            <a:r>
-              <a:t>🔑 JWT-based authentication</a:t>
-            </a:r>
-          </a:p>
-          <a:p>
-            <a:r>
-              <a:t>📱 Mobile-responsive design</a:t>
-            </a:r>
-          </a:p>
-          <a:p>
-            <a:r>
-              <a:t>📊 Advanced reporting features</a:t>
-            </a:r>
-          </a:p>
-          <a:p>
-            <a:r>
-              <a:t>🖼️ QR code generation</a:t>
-            </a:r>
-          </a:p>
-          <a:p>
-            <a:r>
-              <a:t>⏰ Time-based pass expiration</a:t>
-            </a:r>
-          </a:p>
-          <a:p>
-            <a:r>
-              <a:t>📧 Email notifications</a:t>
-            </a:r>
-          </a:p>
-          <a:p>
-            <a:r>
-              <a:t>🔄 Visitor history tracking</a:t>
-            </a:r>
-          </a:p>
+            <a:pPr>
+              <a:spcBef>
+                <a:spcPts val="600"/>
+              </a:spcBef>
+              <a:defRPr sz="1400">
+                <a:solidFill>
+                  <a:srgbClr val="505050"/>
+                </a:solidFill>
+              </a:defRPr>
+            </a:pPr>
+            <a:r>
+              <a:t>🗄️ MySQL Database</a:t>
+            </a:r>
+          </a:p>
+          <a:p>
+            <a:pPr>
+              <a:spcBef>
+                <a:spcPts val="600"/>
+              </a:spcBef>
+              <a:defRPr sz="1400">
+                <a:solidFill>
+                  <a:srgbClr val="505050"/>
+                </a:solidFill>
+              </a:defRPr>
+            </a:pPr>
+            <a:r>
+              <a:t>🔑 JWT Authentication</a:t>
+            </a:r>
+          </a:p>
+          <a:p>
+            <a:pPr>
+              <a:spcBef>
+                <a:spcPts val="600"/>
+              </a:spcBef>
+              <a:defRPr sz="1400">
+                <a:solidFill>
+                  <a:srgbClr val="505050"/>
+                </a:solidFill>
+              </a:defRPr>
+            </a:pPr>
+            <a:r>
+              <a:t>📱 Mobile Design</a:t>
+            </a:r>
+          </a:p>
+          <a:p>
+            <a:pPr>
+              <a:spcBef>
+                <a:spcPts val="600"/>
+              </a:spcBef>
+              <a:defRPr sz="1400">
+                <a:solidFill>
+                  <a:srgbClr val="505050"/>
+                </a:solidFill>
+              </a:defRPr>
+            </a:pPr>
+            <a:r>
+              <a:t>📊 Advanced Reports</a:t>
+            </a:r>
+          </a:p>
+          <a:p>
+            <a:pPr>
+              <a:spcBef>
+                <a:spcPts val="600"/>
+              </a:spcBef>
+              <a:defRPr sz="1400">
+                <a:solidFill>
+                  <a:srgbClr val="505050"/>
+                </a:solidFill>
+              </a:defRPr>
+            </a:pPr>
+            <a:r>
+              <a:t>🖼️ QR Code Generation</a:t>
+            </a:r>
+          </a:p>
+          <a:p>
+            <a:pPr>
+              <a:spcBef>
+                <a:spcPts val="600"/>
+              </a:spcBef>
+              <a:defRPr sz="1400">
+                <a:solidFill>
+                  <a:srgbClr val="505050"/>
+                </a:solidFill>
+              </a:defRPr>
+            </a:pPr>
+            <a:r>
+              <a:t>⏰ Time-based Expiration</a:t>
+            </a:r>
+          </a:p>
+          <a:p>
+            <a:pPr>
+              <a:spcBef>
+                <a:spcPts val="600"/>
+              </a:spcBef>
+              <a:defRPr sz="1400">
+                <a:solidFill>
+                  <a:srgbClr val="505050"/>
+                </a:solidFill>
+              </a:defRPr>
+            </a:pPr>
+            <a:r>
+              <a:t>📧 Email Notifications</a:t>
+            </a:r>
+          </a:p>
+          <a:p>
+            <a:pPr>
+              <a:spcBef>
+                <a:spcPts val="600"/>
+              </a:spcBef>
+              <a:defRPr sz="1400">
+                <a:solidFill>
+                  <a:srgbClr val="505050"/>
+                </a:solidFill>
+              </a:defRPr>
+            </a:pPr>
+            <a:r>
+              <a:t>🔄 History Tracking</a:t>
+            </a:r>
+          </a:p>
+        </p:txBody>
+      </p:sp>
+      <p:sp>
+        <p:nvSpPr>
+          <p:cNvPr id="4" name="Rounded Rectangle 3"/>
+          <p:cNvSpPr/>
+          <p:nvPr/>
+        </p:nvSpPr>
+        <p:spPr>
+          <a:xfrm>
+            <a:off x="4572000" y="2011680"/>
+            <a:ext cx="3840480" cy="4114800"/>
+          </a:xfrm>
+          <a:prstGeom prst="roundRect">
+            <a:avLst/>
+          </a:prstGeom>
+          <a:solidFill>
+            <a:srgbClr val="FFFFFF"/>
+          </a:solidFill>
+          <a:ln w="25400">
+            <a:solidFill>
+              <a:srgbClr val="C8C8C8"/>
+            </a:solidFill>
+          </a:ln>
+        </p:spPr>
+        <p:style>
+          <a:lnRef idx="1">
+            <a:schemeClr val="accent1"/>
+          </a:lnRef>
+          <a:fillRef idx="3">
+            <a:schemeClr val="accent1"/>
+          </a:fillRef>
+          <a:effectRef idx="2">
+            <a:schemeClr val="accent1"/>
+          </a:effectRef>
+          <a:fontRef idx="minor">
+            <a:schemeClr val="lt1"/>
+          </a:fontRef>
+        </p:style>
+        <p:txBody>
+          <a:bodyPr rtlCol="0" anchor="ctr" wrap="square" lIns="182880" rIns="182880" tIns="182880" bIns="182880"/>
+          <a:lstStyle/>
           <a:p>
             <a:r>
               <a:t>Benefits Achieved</a:t>
             </a:r>
           </a:p>
           <a:p>
-            <a:r>
-              <a:t>✅ Streamlined visitor management</a:t>
-            </a:r>
-          </a:p>
-          <a:p>
-            <a:r>
-              <a:t>✅ Enhanced security protocols</a:t>
-            </a:r>
-          </a:p>
-          <a:p>
-            <a:r>
-              <a:t>✅ Digital documentation</a:t>
-            </a:r>
-          </a:p>
-          <a:p>
-            <a:r>
-              <a:t>✅ Quick verification process</a:t>
-            </a:r>
-          </a:p>
-          <a:p>
-            <a:r>
-              <a:t>✅ User-friendly interface</a:t>
-            </a:r>
-          </a:p>
-          <a:p>
-            <a:r>
-              <a:t>Conclusion</a:t>
-            </a:r>
-          </a:p>
-          <a:p>
-            <a:r>
-              <a:t>Vision Gate provides a modern, secure solution for visitor management with room for future expansion.</a:t>
-            </a:r>
-          </a:p>
-          <a:p>
-            <a:r>
-              <a:t>Thank You! Questions?</a:t>
+            <a:pPr>
+              <a:spcBef>
+                <a:spcPts val="800"/>
+              </a:spcBef>
+              <a:defRPr sz="1500">
+                <a:solidFill>
+                  <a:srgbClr val="505050"/>
+                </a:solidFill>
+              </a:defRPr>
+            </a:pPr>
+            <a:r>
+              <a:t>✅ Streamlined Management</a:t>
+            </a:r>
+          </a:p>
+          <a:p>
+            <a:pPr>
+              <a:spcBef>
+                <a:spcPts val="800"/>
+              </a:spcBef>
+              <a:defRPr sz="1500">
+                <a:solidFill>
+                  <a:srgbClr val="505050"/>
+                </a:solidFill>
+              </a:defRPr>
+            </a:pPr>
+            <a:r>
+              <a:t>✅ Enhanced Security</a:t>
+            </a:r>
+          </a:p>
+          <a:p>
+            <a:pPr>
+              <a:spcBef>
+                <a:spcPts val="800"/>
+              </a:spcBef>
+              <a:defRPr sz="1500">
+                <a:solidFill>
+                  <a:srgbClr val="505050"/>
+                </a:solidFill>
+              </a:defRPr>
+            </a:pPr>
+            <a:r>
+              <a:t>✅ Digital Documentation</a:t>
+            </a:r>
+          </a:p>
+          <a:p>
+            <a:pPr>
+              <a:spcBef>
+                <a:spcPts val="800"/>
+              </a:spcBef>
+              <a:defRPr sz="1500">
+                <a:solidFill>
+                  <a:srgbClr val="505050"/>
+                </a:solidFill>
+              </a:defRPr>
+            </a:pPr>
+            <a:r>
+              <a:t>✅ Quick Verification</a:t>
+            </a:r>
+          </a:p>
+          <a:p>
+            <a:pPr>
+              <a:spcBef>
+                <a:spcPts val="800"/>
+              </a:spcBef>
+              <a:defRPr sz="1500">
+                <a:solidFill>
+                  <a:srgbClr val="505050"/>
+                </a:solidFill>
+              </a:defRPr>
+            </a:pPr>
+            <a:r>
+              <a:t>✅ User-friendly Interface</a:t>
+            </a:r>
+          </a:p>
+        </p:txBody>
+      </p:sp>
+      <p:sp>
+        <p:nvSpPr>
+          <p:cNvPr id="5" name="Rounded Rectangle 4"/>
+          <p:cNvSpPr/>
+          <p:nvPr/>
+        </p:nvSpPr>
+        <p:spPr>
+          <a:xfrm>
+            <a:off x="457200" y="6217920"/>
+            <a:ext cx="8229600" cy="548640"/>
+          </a:xfrm>
+          <a:prstGeom prst="roundRect">
+            <a:avLst/>
+          </a:prstGeom>
+          <a:solidFill>
+            <a:srgbClr val="667EEA"/>
+          </a:solidFill>
+          <a:ln>
+            <a:noFill/>
+          </a:ln>
+        </p:spPr>
+        <p:style>
+          <a:lnRef idx="1">
+            <a:schemeClr val="accent1"/>
+          </a:lnRef>
+          <a:fillRef idx="3">
+            <a:schemeClr val="accent1"/>
+          </a:fillRef>
+          <a:effectRef idx="2">
+            <a:schemeClr val="accent1"/>
+          </a:effectRef>
+          <a:fontRef idx="minor">
+            <a:schemeClr val="lt1"/>
+          </a:fontRef>
+        </p:style>
+        <p:txBody>
+          <a:bodyPr rtlCol="0" anchor="ctr"/>
+          <a:lstStyle/>
+          <a:p>
+            <a:pPr algn="ctr">
+              <a:defRPr sz="1600" b="1">
+                <a:solidFill>
+                  <a:srgbClr val="FFFFFF"/>
+                </a:solidFill>
+              </a:defRPr>
+            </a:pPr>
+            <a:r>
+              <a:t>Vision Gate: Modern, Secure Visitor Management with Future-Ready Architecture</a:t>
             </a:r>
           </a:p>
         </p:txBody>
